--- a/docs/2026_snowcrab_leadership_briefing.pptx
+++ b/docs/2026_snowcrab_leadership_briefing.pptx
@@ -2473,7 +2473,7 @@
                 <a:ea typeface="Calibri" pitchFamily="34" charset="-122"/>
                 <a:cs typeface="Calibri" pitchFamily="34" charset="-120"/>
               </a:rPr>
-              <a:t>Industry-preferred males (&gt;101 mm): down 29 percent, 4th lowest in 44 years.</a:t>
+              <a:t>Industry-preferred males (&gt;101 mm): down 29 percent from the 2025 survey, 4th lowest in 44 years.</a:t>
             </a:r>
             <a:endParaRPr lang="en-US" sz="1550" dirty="0"/>
           </a:p>
